--- a/V2授课PPT/W10-第3次课-特征设计与优化（上）：基.pptx
+++ b/V2授课PPT/W10-第3次课-特征设计与优化（上）：基.pptx
@@ -42,6 +42,8 @@
     <p:sldId id="314" r:id="rId66"/>
     <p:sldId id="362" r:id="rId62"/>
     <p:sldId id="363" r:id="rId70"/>
+    <p:sldId id="364" r:id="rId61"/>
+    <p:sldId id="365" r:id="rId72"/>
     <p:sldId id="361" r:id="rId68"/>
     <p:sldId id="315" r:id="rId67"/>
     <p:sldId id="317" r:id="rId69"/>
@@ -8124,7 +8126,7 @@
                 </a:solidFill>
                 <a:latin typeface="微软雅黑"/>
               </a:rPr>
-              <a:t>10 / 63</a:t>
+              <a:t>10 / 65</a:t>
             </a:r>
           </a:p>
         </p:txBody>
@@ -8979,7 +8981,7 @@
                 </a:solidFill>
                 <a:latin typeface="微软雅黑"/>
               </a:rPr>
-              <a:t>11 / 63</a:t>
+              <a:t>11 / 65</a:t>
             </a:r>
           </a:p>
         </p:txBody>
@@ -9771,7 +9773,7 @@
                 </a:solidFill>
                 <a:latin typeface="微软雅黑"/>
               </a:rPr>
-              <a:t>12 / 63</a:t>
+              <a:t>12 / 65</a:t>
             </a:r>
           </a:p>
         </p:txBody>
@@ -10257,7 +10259,7 @@
                 </a:solidFill>
                 <a:latin typeface="微软雅黑"/>
               </a:rPr>
-              <a:t>13 / 63</a:t>
+              <a:t>13 / 65</a:t>
             </a:r>
           </a:p>
         </p:txBody>
@@ -11414,7 +11416,7 @@
                 </a:solidFill>
                 <a:latin typeface="微软雅黑"/>
               </a:rPr>
-              <a:t>14 / 63</a:t>
+              <a:t>14 / 65</a:t>
             </a:r>
           </a:p>
         </p:txBody>
@@ -12120,7 +12122,7 @@
                 </a:solidFill>
                 <a:latin typeface="微软雅黑"/>
               </a:rPr>
-              <a:t>15 / 63</a:t>
+              <a:t>15 / 65</a:t>
             </a:r>
           </a:p>
         </p:txBody>
@@ -12826,7 +12828,7 @@
                 </a:solidFill>
                 <a:latin typeface="微软雅黑"/>
               </a:rPr>
-              <a:t>16 / 63</a:t>
+              <a:t>16 / 65</a:t>
             </a:r>
           </a:p>
         </p:txBody>
@@ -13532,7 +13534,7 @@
                 </a:solidFill>
                 <a:latin typeface="微软雅黑"/>
               </a:rPr>
-              <a:t>17 / 63</a:t>
+              <a:t>17 / 65</a:t>
             </a:r>
           </a:p>
         </p:txBody>
@@ -14238,7 +14240,7 @@
                 </a:solidFill>
                 <a:latin typeface="微软雅黑"/>
               </a:rPr>
-              <a:t>18 / 63</a:t>
+              <a:t>18 / 65</a:t>
             </a:r>
           </a:p>
         </p:txBody>
@@ -14712,7 +14714,7 @@
                 </a:solidFill>
                 <a:latin typeface="微软雅黑"/>
               </a:rPr>
-              <a:t>19 / 63</a:t>
+              <a:t>19 / 65</a:t>
             </a:r>
           </a:p>
         </p:txBody>
@@ -16440,7 +16442,7 @@
                 </a:solidFill>
                 <a:latin typeface="微软雅黑"/>
               </a:rPr>
-              <a:t>2 / 63</a:t>
+              <a:t>2 / 65</a:t>
             </a:r>
           </a:p>
         </p:txBody>
@@ -17146,7 +17148,7 @@
                 </a:solidFill>
                 <a:latin typeface="微软雅黑"/>
               </a:rPr>
-              <a:t>20 / 63</a:t>
+              <a:t>20 / 65</a:t>
             </a:r>
           </a:p>
         </p:txBody>
@@ -18001,7 +18003,7 @@
                 </a:solidFill>
                 <a:latin typeface="微软雅黑"/>
               </a:rPr>
-              <a:t>21 / 63</a:t>
+              <a:t>21 / 65</a:t>
             </a:r>
           </a:p>
         </p:txBody>
@@ -18971,7 +18973,7 @@
                 </a:solidFill>
                 <a:latin typeface="微软雅黑"/>
               </a:rPr>
-              <a:t>22 / 63</a:t>
+              <a:t>22 / 65</a:t>
             </a:r>
           </a:p>
         </p:txBody>
@@ -19941,7 +19943,7 @@
                 </a:solidFill>
                 <a:latin typeface="微软雅黑"/>
               </a:rPr>
-              <a:t>23 / 63</a:t>
+              <a:t>23 / 65</a:t>
             </a:r>
           </a:p>
         </p:txBody>
@@ -20911,7 +20913,7 @@
                 </a:solidFill>
                 <a:latin typeface="微软雅黑"/>
               </a:rPr>
-              <a:t>24 / 63</a:t>
+              <a:t>24 / 65</a:t>
             </a:r>
           </a:p>
         </p:txBody>
@@ -21881,7 +21883,7 @@
                 </a:solidFill>
                 <a:latin typeface="微软雅黑"/>
               </a:rPr>
-              <a:t>25 / 63</a:t>
+              <a:t>25 / 65</a:t>
             </a:r>
           </a:p>
         </p:txBody>
@@ -22851,7 +22853,7 @@
                 </a:solidFill>
                 <a:latin typeface="微软雅黑"/>
               </a:rPr>
-              <a:t>26 / 63</a:t>
+              <a:t>26 / 65</a:t>
             </a:r>
           </a:p>
         </p:txBody>
@@ -23821,7 +23823,7 @@
                 </a:solidFill>
                 <a:latin typeface="微软雅黑"/>
               </a:rPr>
-              <a:t>27 / 63</a:t>
+              <a:t>27 / 65</a:t>
             </a:r>
           </a:p>
         </p:txBody>
@@ -24793,7 +24795,7 @@
                 </a:solidFill>
                 <a:latin typeface="微软雅黑"/>
               </a:rPr>
-              <a:t>28 / 63</a:t>
+              <a:t>28 / 65</a:t>
             </a:r>
           </a:p>
         </p:txBody>
@@ -25237,7 +25239,7 @@
                 </a:solidFill>
                 <a:latin typeface="微软雅黑"/>
               </a:rPr>
-              <a:t>29 / 63</a:t>
+              <a:t>29 / 65</a:t>
             </a:r>
           </a:p>
         </p:txBody>
@@ -26029,7 +26031,7 @@
                 </a:solidFill>
                 <a:latin typeface="微软雅黑"/>
               </a:rPr>
-              <a:t>3 / 63</a:t>
+              <a:t>3 / 65</a:t>
             </a:r>
           </a:p>
         </p:txBody>
@@ -26473,7 +26475,7 @@
                 </a:solidFill>
                 <a:latin typeface="微软雅黑"/>
               </a:rPr>
-              <a:t>30 / 63</a:t>
+              <a:t>30 / 65</a:t>
             </a:r>
           </a:p>
         </p:txBody>
@@ -27517,7 +27519,7 @@
                 </a:solidFill>
                 <a:latin typeface="微软雅黑"/>
               </a:rPr>
-              <a:t>31 / 63</a:t>
+              <a:t>31 / 65</a:t>
             </a:r>
           </a:p>
         </p:txBody>
@@ -28372,7 +28374,7 @@
                 </a:solidFill>
                 <a:latin typeface="微软雅黑"/>
               </a:rPr>
-              <a:t>32 / 63</a:t>
+              <a:t>32 / 65</a:t>
             </a:r>
           </a:p>
         </p:txBody>
@@ -30440,7 +30442,7 @@
                 </a:solidFill>
                 <a:latin typeface="微软雅黑"/>
               </a:rPr>
-              <a:t>33 / 63</a:t>
+              <a:t>33 / 65</a:t>
             </a:r>
           </a:p>
         </p:txBody>
@@ -31232,7 +31234,7 @@
                 </a:solidFill>
                 <a:latin typeface="微软雅黑"/>
               </a:rPr>
-              <a:t>34 / 63</a:t>
+              <a:t>34 / 65</a:t>
             </a:r>
           </a:p>
         </p:txBody>
@@ -31903,7 +31905,7 @@
                 </a:solidFill>
                 <a:latin typeface="微软雅黑"/>
               </a:rPr>
-              <a:t>35 / 63</a:t>
+              <a:t>35 / 65</a:t>
             </a:r>
           </a:p>
         </p:txBody>
@@ -32179,7 +32181,7 @@
                 </a:solidFill>
                 <a:latin typeface="微软雅黑"/>
               </a:rPr>
-              <a:t>36 / 63</a:t>
+              <a:t>36 / 65</a:t>
             </a:r>
           </a:p>
         </p:txBody>
@@ -32351,142 +32353,77 @@
                   <a:srgbClr val="0545E8"/>
                 </a:solidFill>
               </a:rPr>
-              <a:t>① 参考实现真实运行输出（本工单完成态）</a:t>
-            </a:r>
-          </a:p>
-          <a:p>
-            <a:pPr algn="l">
-              <a:spcBef>
-                <a:spcPts val="100"/>
-              </a:spcBef>
-            </a:pPr>
-            <a:r>
-              <a:rPr sz="1000" b="0">
-                <a:solidFill>
-                  <a:srgbClr val="010328"/>
-                </a:solidFill>
-              </a:rPr>
-              <a:t>=== 工单 M1-1b 特征设计与优化 · 完成态 ===</a:t>
-            </a:r>
-          </a:p>
-          <a:p>
-            <a:pPr algn="l">
-              <a:spcBef>
-                <a:spcPts val="100"/>
-              </a:spcBef>
-            </a:pPr>
-            <a:r>
-              <a:rPr sz="1000" b="0">
-                <a:solidFill>
-                  <a:srgbClr val="010328"/>
-                </a:solidFill>
-              </a:rPr>
-              <a:t>特征矩阵: 80 样本 × 5 特征  训练准确率 1.000</a:t>
-            </a:r>
-          </a:p>
-          <a:p>
-            <a:pPr algn="l">
-              <a:spcBef>
-                <a:spcPts val="100"/>
-              </a:spcBef>
-            </a:pPr>
-            <a:r>
-              <a:rPr sz="1000" b="0">
-                <a:solidFill>
-                  <a:srgbClr val="010328"/>
-                </a:solidFill>
-              </a:rPr>
-              <a:t>特征重要性排序:</a:t>
-            </a:r>
-          </a:p>
-          <a:p>
-            <a:pPr algn="l">
-              <a:spcBef>
-                <a:spcPts val="100"/>
-              </a:spcBef>
-            </a:pPr>
-            <a:r>
-              <a:rPr sz="1000" b="0">
-                <a:solidFill>
-                  <a:srgbClr val="010328"/>
-                </a:solidFill>
-              </a:rPr>
-              <a:t>  1. a16   0.580</a:t>
-            </a:r>
-          </a:p>
-          <a:p>
-            <a:pPr algn="l">
-              <a:spcBef>
-                <a:spcPts val="100"/>
-              </a:spcBef>
-            </a:pPr>
-            <a:r>
-              <a:rPr sz="1000" b="0">
-                <a:solidFill>
-                  <a:srgbClr val="010328"/>
-                </a:solidFill>
-              </a:rPr>
-              <a:t>  2. rms   0.258</a:t>
-            </a:r>
-          </a:p>
-          <a:p>
-            <a:pPr algn="l">
-              <a:spcBef>
-                <a:spcPts val="100"/>
-              </a:spcBef>
-            </a:pPr>
-            <a:r>
-              <a:rPr sz="1000" b="0">
-                <a:solidFill>
-                  <a:srgbClr val="010328"/>
-                </a:solidFill>
-              </a:rPr>
-              <a:t>  3. ptp   0.111</a:t>
-            </a:r>
-          </a:p>
-          <a:p>
-            <a:pPr algn="l">
-              <a:spcBef>
-                <a:spcPts val="100"/>
-              </a:spcBef>
-            </a:pPr>
-            <a:r>
-              <a:rPr sz="1000" b="0">
-                <a:solidFill>
-                  <a:srgbClr val="010328"/>
-                </a:solidFill>
-              </a:rPr>
-              <a:t>  4. kurt  0.025</a:t>
-            </a:r>
-          </a:p>
-          <a:p>
-            <a:pPr algn="l">
-              <a:spcBef>
-                <a:spcPts val="100"/>
-              </a:spcBef>
-            </a:pPr>
-            <a:r>
-              <a:rPr sz="1000" b="0">
-                <a:solidFill>
-                  <a:srgbClr val="010328"/>
-                </a:solidFill>
-              </a:rPr>
-              <a:t>  5. a8    0.025</a:t>
-            </a:r>
-          </a:p>
-          <a:p>
-            <a:pPr algn="l">
-              <a:spcBef>
-                <a:spcPts val="100"/>
-              </a:spcBef>
-            </a:pPr>
-            <a:r>
-              <a:rPr sz="1000" b="0">
-                <a:solidFill>
-                  <a:srgbClr val="010328"/>
-                </a:solidFill>
-              </a:rPr>
-              <a:t>结论: 频域 16Hz 幅值（磨损的二倍频指纹）判别力最强 → 特征设计直接决定模型上限。</a:t>
+              <a:t>① 本次真跑实测输出（逐字取自 output/report.txt）</a:t>
+            </a:r>
+          </a:p>
+          <a:p>
+            <a:r>
+              <a:rPr sz="1400" b="1">
+                <a:solidFill>
+                  <a:srgbClr val="0545E8"/>
+                </a:solidFill>
+              </a:rPr>
+              <a:t>实测达成档位: 优(A) ｜ 代码规范率 93.53%（工单把≥70%钉在 D 档）｜ 特征 18 个（最小集 acc 0.4778）｜ 消融砍 33.3% 后 acc -0.0028 ｜ Top3 内新特征 2 个</a:t>
+            </a:r>
+          </a:p>
+          <a:p>
+            <a:r>
+              <a:rPr sz="1400" b="1">
+                <a:solidFill>
+                  <a:srgbClr val="0545E8"/>
+                </a:solidFill>
+              </a:rPr>
+              <a:t>及格(D)    规范率门槛≥70% [达标] ｜ 功能OK ｜ 5 特征表能跑通；代码规范率≥70% ｜ 实测 最小集 5 特征跑通：4 折×3 种子 CV acc 0.4778；规范率 93.53%</a:t>
+            </a:r>
+          </a:p>
+          <a:p>
+            <a:r>
+              <a:rPr sz="1400" b="1">
+                <a:solidFill>
+                  <a:srgbClr val="0545E8"/>
+                </a:solidFill>
+              </a:rPr>
+              <a:t>良好(C)    规范率不另设线（工单仅 D 档设线，实测 93.53%） [达标] ｜ 功能OK ｜ ≥10 特征且字典完整（名称/公式/含义/单位/范围五栏成文） ｜ 实测 特征 18 个（线 10）；字典五栏成文 5/5，缺空 0 处</a:t>
+            </a:r>
+          </a:p>
+          <a:p>
+            <a:r>
+              <a:rPr sz="1400" b="1">
+                <a:solidFill>
+                  <a:srgbClr val="0545E8"/>
+                </a:solidFill>
+              </a:rPr>
+              <a:t>优秀(B)    规范率不另设线（工单仅 D 档设线，实测 93.53%） [达标] ｜ 功能OK ｜ 特征砍 30% 性能不降（消融验证）；决策记录完整 ｜ 实测 尾部砍 33.3%（6 个）后 acc -0.0028（红线 ±0.030）；决策记录 295 字</a:t>
+            </a:r>
+          </a:p>
+          <a:p>
+            <a:r>
+              <a:rPr sz="1400" b="1">
+                <a:solidFill>
+                  <a:srgbClr val="0545E8"/>
+                </a:solidFill>
+              </a:rPr>
+              <a:t>优(A)     规范率不另设线（工单仅 D 档设线，实测 93.53%） [达标] ｜ 功能OK ｜ 新特征进 Top3 且有物理解释 ｜ 实测 Top3 内 v1.1 新特征 2 个：f_ratio2x、f_hf_ratio；物理解释成文 46 字</a:t>
+            </a:r>
+          </a:p>
+          <a:p>
+            <a:r>
+              <a:rPr sz="1400" b="1">
+                <a:solidFill>
+                  <a:srgbClr val="0545E8"/>
+                </a:solidFill>
+              </a:rPr>
+              <a:t>人工答辩项（程序不判、不许自称达标）：口头答辩：为什么比值型特征对工况免疫（企业元师傅签认）；解释说服力：新特征物理解释是否讲得通（程序只判成文+字数达标）；工单末页学习反思单三问（计入过程分 10%）</a:t>
+            </a:r>
+          </a:p>
+          <a:p>
+            <a:r>
+              <a:rPr sz="1400" b="1">
+                <a:solidFill>
+                  <a:srgbClr val="0545E8"/>
+                </a:solidFill>
+              </a:rPr>
+              <a:t>D 层 [达成] 5 特征表能跑通（最小集出指标）+ 代码规范率≥70% ｜ 前 5 特征（t_mean/t_std/t_rms/t_ptp/t_max）4 折×3 种子 CV 跑通：acc 0.4778 / macro-F1 0.47</a:t>
             </a:r>
           </a:p>
         </p:txBody>
@@ -32860,7 +32797,7 @@
                 </a:solidFill>
                 <a:latin typeface="微软雅黑"/>
               </a:rPr>
-              <a:t>37 / 63</a:t>
+              <a:t>37 / 65</a:t>
             </a:r>
           </a:p>
         </p:txBody>
@@ -33475,7 +33412,7 @@
                 </a:solidFill>
                 <a:latin typeface="微软雅黑"/>
               </a:rPr>
-              <a:t>38 / 63</a:t>
+              <a:t>40 / 65</a:t>
             </a:r>
           </a:p>
         </p:txBody>
@@ -34644,7 +34581,7 @@
         <p:spPr>
           <a:xfrm>
             <a:off x="940000" y="5720000"/>
-            <a:ext cx="10500000" cy="520000"/>
+            <a:ext cx="10500000" cy="731520"/>
           </a:xfrm>
           <a:prstGeom prst="rect">
             <a:avLst/>
@@ -34666,13 +34603,24 @@
               </a:spcAft>
             </a:pPr>
             <a:r>
-              <a:rPr sz="1350" b="1">
+              <a:rPr sz="1050" b="1">
                 <a:solidFill>
                   <a:srgbClr val="010328"/>
                 </a:solidFill>
                 <a:latin typeface="微软雅黑"/>
               </a:rPr>
               <a:t>✔ 达标标准: 5特征表能跑通</a:t>
+            </a:r>
+          </a:p>
+          <a:p>
+            <a:r>
+              <a:rPr sz="1050" b="1">
+                <a:solidFill>
+                  <a:srgbClr val="010328"/>
+                </a:solidFill>
+                <a:latin typeface="微软雅黑"/>
+              </a:rPr>
+              <a:t>✓ 本次实测达标 ｜ 规范率门槛≥70% [达标] ｜ 功能OK ｜ 5 特征表能跑通；代码规范率≥70%</a:t>
             </a:r>
           </a:p>
         </p:txBody>
@@ -34800,7 +34748,7 @@
                 </a:solidFill>
                 <a:latin typeface="微软雅黑"/>
               </a:rPr>
-              <a:t>39 / 63</a:t>
+              <a:t>41 / 65</a:t>
             </a:r>
           </a:p>
         </p:txBody>
@@ -35655,7 +35603,7 @@
                 </a:solidFill>
                 <a:latin typeface="微软雅黑"/>
               </a:rPr>
-              <a:t>4 / 63</a:t>
+              <a:t>4 / 65</a:t>
             </a:r>
           </a:p>
         </p:txBody>
@@ -36419,7 +36367,7 @@
         <p:spPr>
           <a:xfrm>
             <a:off x="940000" y="5720000"/>
-            <a:ext cx="10500000" cy="520000"/>
+            <a:ext cx="10500000" cy="731520"/>
           </a:xfrm>
           <a:prstGeom prst="rect">
             <a:avLst/>
@@ -36441,13 +36389,24 @@
               </a:spcAft>
             </a:pPr>
             <a:r>
-              <a:rPr sz="1350" b="1">
+              <a:rPr sz="1050" b="1">
                 <a:solidFill>
                   <a:srgbClr val="010328"/>
                 </a:solidFill>
                 <a:latin typeface="微软雅黑"/>
               </a:rPr>
               <a:t>✔ 达标标准: ≥10特征且字典完整</a:t>
+            </a:r>
+          </a:p>
+          <a:p>
+            <a:r>
+              <a:rPr sz="1050" b="1">
+                <a:solidFill>
+                  <a:srgbClr val="010328"/>
+                </a:solidFill>
+                <a:latin typeface="微软雅黑"/>
+              </a:rPr>
+              <a:t>✓ 本次实测达标 ｜ 规范率不另设线（工单仅 D 档设线，实测 93.53%） [达标] ｜ 功能OK ｜ ≥10 特征且字典完整（名称/公式/含义/单位/范围五栏成文）</a:t>
             </a:r>
           </a:p>
         </p:txBody>
@@ -36575,7 +36534,7 @@
                 </a:solidFill>
                 <a:latin typeface="微软雅黑"/>
               </a:rPr>
-              <a:t>40 / 63</a:t>
+              <a:t>42 / 65</a:t>
             </a:r>
           </a:p>
         </p:txBody>
@@ -37339,7 +37298,7 @@
         <p:spPr>
           <a:xfrm>
             <a:off x="940000" y="5720000"/>
-            <a:ext cx="10500000" cy="520000"/>
+            <a:ext cx="10500000" cy="731520"/>
           </a:xfrm>
           <a:prstGeom prst="rect">
             <a:avLst/>
@@ -37361,13 +37320,24 @@
               </a:spcAft>
             </a:pPr>
             <a:r>
-              <a:rPr sz="1350" b="1">
+              <a:rPr sz="1050" b="1">
                 <a:solidFill>
                   <a:srgbClr val="010328"/>
                 </a:solidFill>
                 <a:latin typeface="微软雅黑"/>
               </a:rPr>
               <a:t>✔ 达标标准: 特征-30%性能不降</a:t>
+            </a:r>
+          </a:p>
+          <a:p>
+            <a:r>
+              <a:rPr sz="1050" b="1">
+                <a:solidFill>
+                  <a:srgbClr val="010328"/>
+                </a:solidFill>
+                <a:latin typeface="微软雅黑"/>
+              </a:rPr>
+              <a:t>✓ 本次实测达标 ｜ 规范率不另设线（工单仅 D 档设线，实测 93.53%） [达标] ｜ 功能OK ｜ 特征砍 30% 性能不降（消融验证）；决策记录完整</a:t>
             </a:r>
           </a:p>
         </p:txBody>
@@ -37495,7 +37465,7 @@
                 </a:solidFill>
                 <a:latin typeface="微软雅黑"/>
               </a:rPr>
-              <a:t>41 / 63</a:t>
+              <a:t>43 / 65</a:t>
             </a:r>
           </a:p>
         </p:txBody>
@@ -38259,7 +38229,7 @@
         <p:spPr>
           <a:xfrm>
             <a:off x="940000" y="5720000"/>
-            <a:ext cx="10500000" cy="520000"/>
+            <a:ext cx="10500000" cy="731520"/>
           </a:xfrm>
           <a:prstGeom prst="rect">
             <a:avLst/>
@@ -38281,13 +38251,24 @@
               </a:spcAft>
             </a:pPr>
             <a:r>
-              <a:rPr sz="1350" b="1">
+              <a:rPr sz="1050" b="1">
                 <a:solidFill>
                   <a:srgbClr val="010328"/>
                 </a:solidFill>
                 <a:latin typeface="微软雅黑"/>
               </a:rPr>
               <a:t>✔ 达标标准: 新特征进Top3且有物理解释</a:t>
+            </a:r>
+          </a:p>
+          <a:p>
+            <a:r>
+              <a:rPr sz="1050" b="1">
+                <a:solidFill>
+                  <a:srgbClr val="010328"/>
+                </a:solidFill>
+                <a:latin typeface="微软雅黑"/>
+              </a:rPr>
+              <a:t>✓ 本次实测达标 ｜ 规范率不另设线（工单仅 D 档设线，实测 93.53%） [达标] ｜ 功能OK ｜ 新特征进 Top3 且有物理解释</a:t>
             </a:r>
           </a:p>
         </p:txBody>
@@ -38415,7 +38396,7 @@
                 </a:solidFill>
                 <a:latin typeface="微软雅黑"/>
               </a:rPr>
-              <a:t>42 / 63</a:t>
+              <a:t>44 / 65</a:t>
             </a:r>
           </a:p>
         </p:txBody>
@@ -39339,7 +39320,7 @@
                 </a:solidFill>
                 <a:latin typeface="微软雅黑"/>
               </a:rPr>
-              <a:t>43 / 63</a:t>
+              <a:t>45 / 65</a:t>
             </a:r>
           </a:p>
         </p:txBody>
@@ -40511,7 +40492,7 @@
                 </a:solidFill>
                 <a:latin typeface="微软雅黑"/>
               </a:rPr>
-              <a:t>44 / 63</a:t>
+              <a:t>46 / 65</a:t>
             </a:r>
           </a:p>
         </p:txBody>
@@ -41303,7 +41284,7 @@
                 </a:solidFill>
                 <a:latin typeface="微软雅黑"/>
               </a:rPr>
-              <a:t>45 / 63</a:t>
+              <a:t>47 / 65</a:t>
             </a:r>
           </a:p>
         </p:txBody>
@@ -42095,7 +42076,7 @@
                 </a:solidFill>
                 <a:latin typeface="微软雅黑"/>
               </a:rPr>
-              <a:t>46 / 63</a:t>
+              <a:t>48 / 65</a:t>
             </a:r>
           </a:p>
         </p:txBody>
@@ -42950,7 +42931,7 @@
                 </a:solidFill>
                 <a:latin typeface="微软雅黑"/>
               </a:rPr>
-              <a:t>47 / 63</a:t>
+              <a:t>49 / 65</a:t>
             </a:r>
           </a:p>
         </p:txBody>
@@ -43658,7 +43639,7 @@
                 </a:solidFill>
                 <a:latin typeface="微软雅黑"/>
               </a:rPr>
-              <a:t>48 / 63</a:t>
+              <a:t>50 / 65</a:t>
             </a:r>
           </a:p>
         </p:txBody>
@@ -44298,7 +44279,7 @@
                 </a:solidFill>
                 <a:latin typeface="微软雅黑"/>
               </a:rPr>
-              <a:t>49 / 63</a:t>
+              <a:t>51 / 65</a:t>
             </a:r>
           </a:p>
         </p:txBody>
@@ -45270,7 +45251,7 @@
                 </a:solidFill>
                 <a:latin typeface="微软雅黑"/>
               </a:rPr>
-              <a:t>5 / 63</a:t>
+              <a:t>5 / 65</a:t>
             </a:r>
           </a:p>
         </p:txBody>
@@ -46242,7 +46223,7 @@
                 </a:solidFill>
                 <a:latin typeface="微软雅黑"/>
               </a:rPr>
-              <a:t>50 / 63</a:t>
+              <a:t>52 / 65</a:t>
             </a:r>
           </a:p>
         </p:txBody>
@@ -47034,7 +47015,7 @@
                 </a:solidFill>
                 <a:latin typeface="微软雅黑"/>
               </a:rPr>
-              <a:t>51 / 63</a:t>
+              <a:t>53 / 65</a:t>
             </a:r>
           </a:p>
         </p:txBody>
@@ -48666,7 +48647,7 @@
                 </a:solidFill>
                 <a:latin typeface="微软雅黑"/>
               </a:rPr>
-              <a:t>52 / 63</a:t>
+              <a:t>54 / 65</a:t>
             </a:r>
           </a:p>
         </p:txBody>
@@ -49464,7 +49445,7 @@
                 </a:solidFill>
                 <a:latin typeface="微软雅黑"/>
               </a:rPr>
-              <a:t>53 / 63</a:t>
+              <a:t>55 / 65</a:t>
             </a:r>
           </a:p>
         </p:txBody>
@@ -50610,7 +50591,7 @@
                 </a:solidFill>
                 <a:latin typeface="微软雅黑"/>
               </a:rPr>
-              <a:t>54 / 63</a:t>
+              <a:t>56 / 65</a:t>
             </a:r>
           </a:p>
         </p:txBody>
@@ -51463,7 +51444,7 @@
                 </a:solidFill>
                 <a:latin typeface="微软雅黑"/>
               </a:rPr>
-              <a:t>55 / 63</a:t>
+              <a:t>57 / 65</a:t>
             </a:r>
           </a:p>
         </p:txBody>
@@ -52435,7 +52416,7 @@
                 </a:solidFill>
                 <a:latin typeface="微软雅黑"/>
               </a:rPr>
-              <a:t>56 / 63</a:t>
+              <a:t>58 / 65</a:t>
             </a:r>
           </a:p>
         </p:txBody>
@@ -53407,7 +53388,7 @@
                 </a:solidFill>
                 <a:latin typeface="微软雅黑"/>
               </a:rPr>
-              <a:t>57 / 63</a:t>
+              <a:t>59 / 65</a:t>
             </a:r>
           </a:p>
         </p:txBody>
@@ -54379,7 +54360,7 @@
                 </a:solidFill>
                 <a:latin typeface="微软雅黑"/>
               </a:rPr>
-              <a:t>58 / 63</a:t>
+              <a:t>60 / 65</a:t>
             </a:r>
           </a:p>
         </p:txBody>
@@ -55638,7 +55619,7 @@
                 </a:solidFill>
                 <a:latin typeface="微软雅黑"/>
               </a:rPr>
-              <a:t>59 / 63</a:t>
+              <a:t>61 / 65</a:t>
             </a:r>
           </a:p>
         </p:txBody>
@@ -57106,7 +57087,7 @@
                 </a:solidFill>
                 <a:latin typeface="微软雅黑"/>
               </a:rPr>
-              <a:t>6 / 63</a:t>
+              <a:t>6 / 65</a:t>
             </a:r>
           </a:p>
         </p:txBody>
@@ -57898,7 +57879,7 @@
                 </a:solidFill>
                 <a:latin typeface="微软雅黑"/>
               </a:rPr>
-              <a:t>60 / 63</a:t>
+              <a:t>62 / 65</a:t>
             </a:r>
           </a:p>
         </p:txBody>
@@ -58604,7 +58585,7 @@
                 </a:solidFill>
                 <a:latin typeface="微软雅黑"/>
               </a:rPr>
-              <a:t>61 / 63</a:t>
+              <a:t>63 / 65</a:t>
             </a:r>
           </a:p>
         </p:txBody>
@@ -58964,7 +58945,7 @@
                 </a:solidFill>
                 <a:latin typeface="微软雅黑"/>
               </a:rPr>
-              <a:t>62 / 63</a:t>
+              <a:t>64 / 65</a:t>
             </a:r>
           </a:p>
         </p:txBody>
@@ -59335,6 +59316,2051 @@
 </p:sld>
 </file>
 
+<file path=ppt/slides/slide64.xml><?xml version="1.0" encoding="utf-8"?>
+<p:sld xmlns:a="http://schemas.openxmlformats.org/drawingml/2006/main" xmlns:p="http://schemas.openxmlformats.org/presentationml/2006/main" xmlns:r="http://schemas.openxmlformats.org/officeDocument/2006/relationships">
+  <p:cSld>
+    <p:spTree>
+      <p:nvGrpSpPr>
+        <p:cNvPr id="1" name=""/>
+        <p:cNvGrpSpPr/>
+        <p:nvPr/>
+      </p:nvGrpSpPr>
+      <p:grpSpPr/>
+      <p:sp>
+        <p:nvSpPr>
+          <p:cNvPr id="2" name="Rectangle 1"/>
+          <p:cNvSpPr/>
+          <p:nvPr/>
+        </p:nvSpPr>
+        <p:spPr>
+          <a:xfrm>
+            <a:off x="0" y="0"/>
+            <a:ext cx="12192000" cy="1150000"/>
+          </a:xfrm>
+          <a:prstGeom prst="rect">
+            <a:avLst/>
+          </a:prstGeom>
+          <a:solidFill>
+            <a:srgbClr val="010328"/>
+          </a:solidFill>
+          <a:ln>
+            <a:noFill/>
+          </a:ln>
+          <a:effectLst/>
+        </p:spPr>
+        <p:style>
+          <a:lnRef idx="1">
+            <a:schemeClr val="accent1"/>
+          </a:lnRef>
+          <a:fillRef idx="3">
+            <a:schemeClr val="accent1"/>
+          </a:fillRef>
+          <a:effectRef idx="2">
+            <a:schemeClr val="accent1"/>
+          </a:effectRef>
+          <a:fontRef idx="minor">
+            <a:schemeClr val="lt1"/>
+          </a:fontRef>
+        </p:style>
+        <p:txBody>
+          <a:bodyPr rtlCol="0" anchor="ctr"/>
+          <a:lstStyle/>
+          <a:p>
+            <a:pPr algn="ctr"/>
+          </a:p>
+        </p:txBody>
+      </p:sp>
+      <p:sp>
+        <p:nvSpPr>
+          <p:cNvPr id="3" name="Rectangle 2"/>
+          <p:cNvSpPr/>
+          <p:nvPr/>
+        </p:nvSpPr>
+        <p:spPr>
+          <a:xfrm>
+            <a:off x="0" y="1150000"/>
+            <a:ext cx="2600000" cy="70000"/>
+          </a:xfrm>
+          <a:prstGeom prst="rect">
+            <a:avLst/>
+          </a:prstGeom>
+          <a:solidFill>
+            <a:srgbClr val="F5670F"/>
+          </a:solidFill>
+          <a:ln>
+            <a:noFill/>
+          </a:ln>
+          <a:effectLst/>
+        </p:spPr>
+        <p:style>
+          <a:lnRef idx="1">
+            <a:schemeClr val="accent1"/>
+          </a:lnRef>
+          <a:fillRef idx="3">
+            <a:schemeClr val="accent1"/>
+          </a:fillRef>
+          <a:effectRef idx="2">
+            <a:schemeClr val="accent1"/>
+          </a:effectRef>
+          <a:fontRef idx="minor">
+            <a:schemeClr val="lt1"/>
+          </a:fontRef>
+        </p:style>
+        <p:txBody>
+          <a:bodyPr rtlCol="0" anchor="ctr"/>
+          <a:lstStyle/>
+          <a:p>
+            <a:pPr algn="ctr"/>
+          </a:p>
+        </p:txBody>
+      </p:sp>
+      <p:sp>
+        <p:nvSpPr>
+          <p:cNvPr id="4" name="TextBox 3"/>
+          <p:cNvSpPr txBox="1"/>
+          <p:nvPr/>
+        </p:nvSpPr>
+        <p:spPr>
+          <a:xfrm>
+            <a:off x="700000" y="300000"/>
+            <a:ext cx="10792000" cy="700000"/>
+          </a:xfrm>
+          <a:prstGeom prst="rect">
+            <a:avLst/>
+          </a:prstGeom>
+          <a:noFill/>
+        </p:spPr>
+        <p:txBody>
+          <a:bodyPr wrap="square" anchor="t">
+            <a:spAutoFit/>
+          </a:bodyPr>
+          <a:lstStyle/>
+          <a:p>
+            <a:pPr algn="l">
+              <a:lnSpc>
+                <a:spcPct val="110000"/>
+              </a:lnSpc>
+              <a:spcAft>
+                <a:spcPts val="600"/>
+              </a:spcAft>
+            </a:pPr>
+            <a:r>
+              <a:rPr sz="2400" b="1">
+                <a:solidFill>
+                  <a:srgbClr val="FFFFFF"/>
+                </a:solidFill>
+                <a:latin typeface="微软雅黑"/>
+              </a:rPr>
+              <a:t>实测验收 · m11b_feature_design</a:t>
+            </a:r>
+          </a:p>
+        </p:txBody>
+      </p:sp>
+      <p:sp>
+        <p:nvSpPr>
+          <p:cNvPr id="11" name="Rectangle 10"/>
+          <p:cNvSpPr/>
+          <p:nvPr/>
+        </p:nvSpPr>
+        <p:spPr>
+          <a:xfrm>
+            <a:off x="500000" y="6500000"/>
+            <a:ext cx="11100000" cy="20000"/>
+          </a:xfrm>
+          <a:prstGeom prst="rect">
+            <a:avLst/>
+          </a:prstGeom>
+          <a:solidFill>
+            <a:srgbClr val="C9D4EE"/>
+          </a:solidFill>
+          <a:ln>
+            <a:noFill/>
+          </a:ln>
+          <a:effectLst/>
+        </p:spPr>
+        <p:style>
+          <a:lnRef idx="1">
+            <a:schemeClr val="accent1"/>
+          </a:lnRef>
+          <a:fillRef idx="3">
+            <a:schemeClr val="accent1"/>
+          </a:fillRef>
+          <a:effectRef idx="2">
+            <a:schemeClr val="accent1"/>
+          </a:effectRef>
+          <a:fontRef idx="minor">
+            <a:schemeClr val="lt1"/>
+          </a:fontRef>
+        </p:style>
+        <p:txBody>
+          <a:bodyPr rtlCol="0" anchor="ctr"/>
+          <a:lstStyle/>
+          <a:p>
+            <a:pPr algn="ctr"/>
+          </a:p>
+        </p:txBody>
+      </p:sp>
+      <p:sp>
+        <p:nvSpPr>
+          <p:cNvPr id="12" name="TextBox 11"/>
+          <p:cNvSpPr txBox="1"/>
+          <p:nvPr/>
+        </p:nvSpPr>
+        <p:spPr>
+          <a:xfrm>
+            <a:off x="500000" y="6540000"/>
+            <a:ext cx="7000000" cy="300000"/>
+          </a:xfrm>
+          <a:prstGeom prst="rect">
+            <a:avLst/>
+          </a:prstGeom>
+          <a:noFill/>
+        </p:spPr>
+        <p:txBody>
+          <a:bodyPr wrap="square" anchor="t">
+            <a:spAutoFit/>
+          </a:bodyPr>
+          <a:lstStyle/>
+          <a:p>
+            <a:pPr algn="l">
+              <a:lnSpc>
+                <a:spcPct val="110000"/>
+              </a:lnSpc>
+              <a:spcAft>
+                <a:spcPts val="600"/>
+              </a:spcAft>
+            </a:pPr>
+            <a:r>
+              <a:rPr sz="1000" b="0">
+                <a:solidFill>
+                  <a:srgbClr val="8A97B5"/>
+                </a:solidFill>
+                <a:latin typeface="微软雅黑"/>
+              </a:rPr>
+              <a:t>两江智造集团 · AI应用基础48课时版</a:t>
+            </a:r>
+          </a:p>
+        </p:txBody>
+      </p:sp>
+      <p:sp>
+        <p:nvSpPr>
+          <p:cNvPr id="13" name="TextBox 12"/>
+          <p:cNvSpPr txBox="1"/>
+          <p:nvPr/>
+        </p:nvSpPr>
+        <p:spPr>
+          <a:xfrm>
+            <a:off x="10600000" y="6540000"/>
+            <a:ext cx="1000000" cy="300000"/>
+          </a:xfrm>
+          <a:prstGeom prst="rect">
+            <a:avLst/>
+          </a:prstGeom>
+          <a:noFill/>
+        </p:spPr>
+        <p:txBody>
+          <a:bodyPr wrap="square" anchor="t">
+            <a:spAutoFit/>
+          </a:bodyPr>
+          <a:lstStyle/>
+          <a:p>
+            <a:pPr algn="r">
+              <a:lnSpc>
+                <a:spcPct val="110000"/>
+              </a:lnSpc>
+              <a:spcAft>
+                <a:spcPts val="600"/>
+              </a:spcAft>
+            </a:pPr>
+            <a:r>
+              <a:rPr sz="1000" b="0">
+                <a:solidFill>
+                  <a:srgbClr val="8A97B5"/>
+                </a:solidFill>
+                <a:latin typeface="微软雅黑"/>
+              </a:rPr>
+              <a:t>38 / 65</a:t>
+            </a:r>
+          </a:p>
+        </p:txBody>
+      </p:sp>
+      <p:sp>
+        <p:nvSpPr>
+          <p:cNvPr id="14" name="Rectangle 13"/>
+          <p:cNvSpPr/>
+          <p:nvPr/>
+        </p:nvSpPr>
+        <p:spPr>
+          <a:xfrm>
+            <a:off x="0" y="1371600"/>
+            <a:ext cx="12188952" cy="713232"/>
+          </a:xfrm>
+          <a:prstGeom prst="rect">
+            <a:avLst/>
+          </a:prstGeom>
+          <a:solidFill>
+            <a:srgbClr val="F2F5F9"/>
+          </a:solidFill>
+          <a:ln>
+            <a:noFill/>
+          </a:ln>
+          <a:effectLst/>
+        </p:spPr>
+        <p:style>
+          <a:lnRef idx="1">
+            <a:schemeClr val="accent1"/>
+          </a:lnRef>
+          <a:fillRef idx="3">
+            <a:schemeClr val="accent1"/>
+          </a:fillRef>
+          <a:effectRef idx="2">
+            <a:schemeClr val="accent1"/>
+          </a:effectRef>
+          <a:fontRef idx="minor">
+            <a:schemeClr val="lt1"/>
+          </a:fontRef>
+        </p:style>
+        <p:txBody>
+          <a:bodyPr rtlCol="0" anchor="ctr" wrap="square"/>
+          <a:lstStyle/>
+          <a:p>
+            <a:pPr algn="ctr"/>
+          </a:p>
+        </p:txBody>
+      </p:sp>
+      <p:sp>
+        <p:nvSpPr>
+          <p:cNvPr id="15" name="TextBox 14"/>
+          <p:cNvSpPr txBox="1"/>
+          <p:nvPr/>
+        </p:nvSpPr>
+        <p:spPr>
+          <a:xfrm>
+            <a:off x="457200" y="1426464"/>
+            <a:ext cx="2651760" cy="566928"/>
+          </a:xfrm>
+          <a:prstGeom prst="rect">
+            <a:avLst/>
+          </a:prstGeom>
+          <a:noFill/>
+        </p:spPr>
+        <p:txBody>
+          <a:bodyPr wrap="square">
+            <a:spAutoFit/>
+          </a:bodyPr>
+          <a:lstStyle/>
+          <a:p>
+            <a:r>
+              <a:rPr sz="1400" b="1">
+                <a:solidFill>
+                  <a:srgbClr val="2E7D46"/>
+                </a:solidFill>
+                <a:latin typeface="微软雅黑"/>
+              </a:rPr>
+              <a:t>实测达成档位</a:t>
+            </a:r>
+          </a:p>
+          <a:p>
+            <a:r>
+              <a:rPr sz="1400" b="1">
+                <a:solidFill>
+                  <a:srgbClr val="2E7D46"/>
+                </a:solidFill>
+                <a:latin typeface="微软雅黑"/>
+              </a:rPr>
+              <a:t>优(A)</a:t>
+            </a:r>
+          </a:p>
+        </p:txBody>
+      </p:sp>
+      <p:sp>
+        <p:nvSpPr>
+          <p:cNvPr id="16" name="Rectangle 15"/>
+          <p:cNvSpPr/>
+          <p:nvPr/>
+        </p:nvSpPr>
+        <p:spPr>
+          <a:xfrm>
+            <a:off x="3200400" y="1426464"/>
+            <a:ext cx="1627632" cy="603504"/>
+          </a:xfrm>
+          <a:prstGeom prst="rect">
+            <a:avLst/>
+          </a:prstGeom>
+          <a:solidFill>
+            <a:srgbClr val="FFFFFF"/>
+          </a:solidFill>
+          <a:ln>
+            <a:solidFill>
+              <a:srgbClr val="D6DCE4"/>
+            </a:solidFill>
+          </a:ln>
+          <a:effectLst/>
+        </p:spPr>
+        <p:style>
+          <a:lnRef idx="1">
+            <a:schemeClr val="accent1"/>
+          </a:lnRef>
+          <a:fillRef idx="3">
+            <a:schemeClr val="accent1"/>
+          </a:fillRef>
+          <a:effectRef idx="2">
+            <a:schemeClr val="accent1"/>
+          </a:effectRef>
+          <a:fontRef idx="minor">
+            <a:schemeClr val="lt1"/>
+          </a:fontRef>
+        </p:style>
+        <p:txBody>
+          <a:bodyPr rtlCol="0" anchor="ctr" wrap="square"/>
+          <a:lstStyle/>
+          <a:p>
+            <a:pPr algn="ctr"/>
+          </a:p>
+        </p:txBody>
+      </p:sp>
+      <p:sp>
+        <p:nvSpPr>
+          <p:cNvPr id="17" name="TextBox 16"/>
+          <p:cNvSpPr txBox="1"/>
+          <p:nvPr/>
+        </p:nvSpPr>
+        <p:spPr>
+          <a:xfrm>
+            <a:off x="3246120" y="1463040"/>
+            <a:ext cx="1536192" cy="548640"/>
+          </a:xfrm>
+          <a:prstGeom prst="rect">
+            <a:avLst/>
+          </a:prstGeom>
+          <a:noFill/>
+        </p:spPr>
+        <p:txBody>
+          <a:bodyPr wrap="square">
+            <a:spAutoFit/>
+          </a:bodyPr>
+          <a:lstStyle/>
+          <a:p>
+            <a:r>
+              <a:rPr sz="900" b="0">
+                <a:solidFill>
+                  <a:srgbClr val="35506E"/>
+                </a:solidFill>
+                <a:latin typeface="微软雅黑"/>
+              </a:rPr>
+              <a:t>代码规范率 93.53%（工单把≥70%钉在 D 档）</a:t>
+            </a:r>
+          </a:p>
+        </p:txBody>
+      </p:sp>
+      <p:sp>
+        <p:nvSpPr>
+          <p:cNvPr id="18" name="Rectangle 17"/>
+          <p:cNvSpPr/>
+          <p:nvPr/>
+        </p:nvSpPr>
+        <p:spPr>
+          <a:xfrm>
+            <a:off x="4901184" y="1426464"/>
+            <a:ext cx="1627632" cy="603504"/>
+          </a:xfrm>
+          <a:prstGeom prst="rect">
+            <a:avLst/>
+          </a:prstGeom>
+          <a:solidFill>
+            <a:srgbClr val="FFFFFF"/>
+          </a:solidFill>
+          <a:ln>
+            <a:solidFill>
+              <a:srgbClr val="D6DCE4"/>
+            </a:solidFill>
+          </a:ln>
+          <a:effectLst/>
+        </p:spPr>
+        <p:style>
+          <a:lnRef idx="1">
+            <a:schemeClr val="accent1"/>
+          </a:lnRef>
+          <a:fillRef idx="3">
+            <a:schemeClr val="accent1"/>
+          </a:fillRef>
+          <a:effectRef idx="2">
+            <a:schemeClr val="accent1"/>
+          </a:effectRef>
+          <a:fontRef idx="minor">
+            <a:schemeClr val="lt1"/>
+          </a:fontRef>
+        </p:style>
+        <p:txBody>
+          <a:bodyPr rtlCol="0" anchor="ctr" wrap="square"/>
+          <a:lstStyle/>
+          <a:p>
+            <a:pPr algn="ctr"/>
+          </a:p>
+        </p:txBody>
+      </p:sp>
+      <p:sp>
+        <p:nvSpPr>
+          <p:cNvPr id="19" name="TextBox 18"/>
+          <p:cNvSpPr txBox="1"/>
+          <p:nvPr/>
+        </p:nvSpPr>
+        <p:spPr>
+          <a:xfrm>
+            <a:off x="4946904" y="1463040"/>
+            <a:ext cx="1536192" cy="548640"/>
+          </a:xfrm>
+          <a:prstGeom prst="rect">
+            <a:avLst/>
+          </a:prstGeom>
+          <a:noFill/>
+        </p:spPr>
+        <p:txBody>
+          <a:bodyPr wrap="square">
+            <a:spAutoFit/>
+          </a:bodyPr>
+          <a:lstStyle/>
+          <a:p>
+            <a:r>
+              <a:rPr sz="900" b="0">
+                <a:solidFill>
+                  <a:srgbClr val="35506E"/>
+                </a:solidFill>
+                <a:latin typeface="微软雅黑"/>
+              </a:rPr>
+              <a:t>特征 18 个（最小集 acc 0.4778）</a:t>
+            </a:r>
+          </a:p>
+        </p:txBody>
+      </p:sp>
+      <p:sp>
+        <p:nvSpPr>
+          <p:cNvPr id="20" name="Rectangle 19"/>
+          <p:cNvSpPr/>
+          <p:nvPr/>
+        </p:nvSpPr>
+        <p:spPr>
+          <a:xfrm>
+            <a:off x="6601968" y="1426464"/>
+            <a:ext cx="1627632" cy="603504"/>
+          </a:xfrm>
+          <a:prstGeom prst="rect">
+            <a:avLst/>
+          </a:prstGeom>
+          <a:solidFill>
+            <a:srgbClr val="FFFFFF"/>
+          </a:solidFill>
+          <a:ln>
+            <a:solidFill>
+              <a:srgbClr val="D6DCE4"/>
+            </a:solidFill>
+          </a:ln>
+          <a:effectLst/>
+        </p:spPr>
+        <p:style>
+          <a:lnRef idx="1">
+            <a:schemeClr val="accent1"/>
+          </a:lnRef>
+          <a:fillRef idx="3">
+            <a:schemeClr val="accent1"/>
+          </a:fillRef>
+          <a:effectRef idx="2">
+            <a:schemeClr val="accent1"/>
+          </a:effectRef>
+          <a:fontRef idx="minor">
+            <a:schemeClr val="lt1"/>
+          </a:fontRef>
+        </p:style>
+        <p:txBody>
+          <a:bodyPr rtlCol="0" anchor="ctr" wrap="square"/>
+          <a:lstStyle/>
+          <a:p>
+            <a:pPr algn="ctr"/>
+          </a:p>
+        </p:txBody>
+      </p:sp>
+      <p:sp>
+        <p:nvSpPr>
+          <p:cNvPr id="21" name="TextBox 20"/>
+          <p:cNvSpPr txBox="1"/>
+          <p:nvPr/>
+        </p:nvSpPr>
+        <p:spPr>
+          <a:xfrm>
+            <a:off x="6647688" y="1463040"/>
+            <a:ext cx="1536192" cy="548640"/>
+          </a:xfrm>
+          <a:prstGeom prst="rect">
+            <a:avLst/>
+          </a:prstGeom>
+          <a:noFill/>
+        </p:spPr>
+        <p:txBody>
+          <a:bodyPr wrap="square">
+            <a:spAutoFit/>
+          </a:bodyPr>
+          <a:lstStyle/>
+          <a:p>
+            <a:r>
+              <a:rPr sz="900" b="0">
+                <a:solidFill>
+                  <a:srgbClr val="35506E"/>
+                </a:solidFill>
+                <a:latin typeface="微软雅黑"/>
+              </a:rPr>
+              <a:t>消融砍 33.3% 后 acc -0.0028</a:t>
+            </a:r>
+          </a:p>
+        </p:txBody>
+      </p:sp>
+      <p:sp>
+        <p:nvSpPr>
+          <p:cNvPr id="22" name="Rectangle 21"/>
+          <p:cNvSpPr/>
+          <p:nvPr/>
+        </p:nvSpPr>
+        <p:spPr>
+          <a:xfrm>
+            <a:off x="8302752" y="1426464"/>
+            <a:ext cx="1627632" cy="603504"/>
+          </a:xfrm>
+          <a:prstGeom prst="rect">
+            <a:avLst/>
+          </a:prstGeom>
+          <a:solidFill>
+            <a:srgbClr val="FFFFFF"/>
+          </a:solidFill>
+          <a:ln>
+            <a:solidFill>
+              <a:srgbClr val="D6DCE4"/>
+            </a:solidFill>
+          </a:ln>
+          <a:effectLst/>
+        </p:spPr>
+        <p:style>
+          <a:lnRef idx="1">
+            <a:schemeClr val="accent1"/>
+          </a:lnRef>
+          <a:fillRef idx="3">
+            <a:schemeClr val="accent1"/>
+          </a:fillRef>
+          <a:effectRef idx="2">
+            <a:schemeClr val="accent1"/>
+          </a:effectRef>
+          <a:fontRef idx="minor">
+            <a:schemeClr val="lt1"/>
+          </a:fontRef>
+        </p:style>
+        <p:txBody>
+          <a:bodyPr rtlCol="0" anchor="ctr" wrap="square"/>
+          <a:lstStyle/>
+          <a:p>
+            <a:pPr algn="ctr"/>
+          </a:p>
+        </p:txBody>
+      </p:sp>
+      <p:sp>
+        <p:nvSpPr>
+          <p:cNvPr id="23" name="TextBox 22"/>
+          <p:cNvSpPr txBox="1"/>
+          <p:nvPr/>
+        </p:nvSpPr>
+        <p:spPr>
+          <a:xfrm>
+            <a:off x="8348472" y="1463040"/>
+            <a:ext cx="1536192" cy="548640"/>
+          </a:xfrm>
+          <a:prstGeom prst="rect">
+            <a:avLst/>
+          </a:prstGeom>
+          <a:noFill/>
+        </p:spPr>
+        <p:txBody>
+          <a:bodyPr wrap="square">
+            <a:spAutoFit/>
+          </a:bodyPr>
+          <a:lstStyle/>
+          <a:p>
+            <a:r>
+              <a:rPr sz="900" b="0">
+                <a:solidFill>
+                  <a:srgbClr val="35506E"/>
+                </a:solidFill>
+                <a:latin typeface="微软雅黑"/>
+              </a:rPr>
+              <a:t>Top3 内新特征 2 个</a:t>
+            </a:r>
+          </a:p>
+        </p:txBody>
+      </p:sp>
+      <p:graphicFrame>
+        <p:nvGraphicFramePr>
+          <p:cNvPr id="24" name="Table 23"/>
+          <p:cNvGraphicFramePr>
+            <a:graphicFrameLocks noGrp="1"/>
+          </p:cNvGraphicFramePr>
+          <p:nvPr/>
+        </p:nvGraphicFramePr>
+        <p:xfrm>
+          <a:off x="457200" y="2212848"/>
+          <a:ext cx="11274552" cy="2834640"/>
+        </p:xfrm>
+        <a:graphic>
+          <a:graphicData uri="http://schemas.openxmlformats.org/drawingml/2006/table">
+            <a:tbl>
+              <a:tblPr firstRow="1" bandRow="1">
+                <a:tableStyleId>{5C22544A-7EE6-4342-B048-85BDC9FD1C3A}</a:tableStyleId>
+              </a:tblPr>
+              <a:tblGrid>
+                <a:gridCol w="1188720"/>
+                <a:gridCol w="5120640"/>
+                <a:gridCol w="3886200"/>
+                <a:gridCol w="1078992"/>
+              </a:tblGrid>
+              <a:tr h="566928">
+                <a:tc>
+                  <a:txBody>
+                    <a:bodyPr/>
+                    <a:lstStyle/>
+                    <a:p>
+                      <a:r>
+                        <a:rPr sz="1050" b="1">
+                          <a:solidFill>
+                            <a:srgbClr val="FFFFFF"/>
+                          </a:solidFill>
+                          <a:latin typeface="微软雅黑"/>
+                        </a:rPr>
+                        <a:t>档位</a:t>
+                      </a:r>
+                    </a:p>
+                  </a:txBody>
+                  <a:tcPr>
+                    <a:solidFill>
+                      <a:srgbClr val="010328"/>
+                    </a:solidFill>
+                  </a:tcPr>
+                </a:tc>
+                <a:tc>
+                  <a:txBody>
+                    <a:bodyPr/>
+                    <a:lstStyle/>
+                    <a:p>
+                      <a:r>
+                        <a:rPr sz="1050" b="1">
+                          <a:solidFill>
+                            <a:srgbClr val="FFFFFF"/>
+                          </a:solidFill>
+                          <a:latin typeface="微软雅黑"/>
+                        </a:rPr>
+                        <a:t>工单验收标准（原文）</a:t>
+                      </a:r>
+                    </a:p>
+                  </a:txBody>
+                  <a:tcPr>
+                    <a:solidFill>
+                      <a:srgbClr val="010328"/>
+                    </a:solidFill>
+                  </a:tcPr>
+                </a:tc>
+                <a:tc>
+                  <a:txBody>
+                    <a:bodyPr/>
+                    <a:lstStyle/>
+                    <a:p>
+                      <a:r>
+                        <a:rPr sz="1050" b="1">
+                          <a:solidFill>
+                            <a:srgbClr val="FFFFFF"/>
+                          </a:solidFill>
+                          <a:latin typeface="微软雅黑"/>
+                        </a:rPr>
+                        <a:t>本次实测判定</a:t>
+                      </a:r>
+                    </a:p>
+                  </a:txBody>
+                  <a:tcPr>
+                    <a:solidFill>
+                      <a:srgbClr val="010328"/>
+                    </a:solidFill>
+                  </a:tcPr>
+                </a:tc>
+                <a:tc>
+                  <a:txBody>
+                    <a:bodyPr/>
+                    <a:lstStyle/>
+                    <a:p>
+                      <a:r>
+                        <a:rPr sz="1050" b="1">
+                          <a:solidFill>
+                            <a:srgbClr val="FFFFFF"/>
+                          </a:solidFill>
+                          <a:latin typeface="微软雅黑"/>
+                        </a:rPr>
+                        <a:t>判定</a:t>
+                      </a:r>
+                    </a:p>
+                  </a:txBody>
+                  <a:tcPr>
+                    <a:solidFill>
+                      <a:srgbClr val="010328"/>
+                    </a:solidFill>
+                  </a:tcPr>
+                </a:tc>
+              </a:tr>
+              <a:tr h="566928">
+                <a:tc>
+                  <a:txBody>
+                    <a:bodyPr/>
+                    <a:lstStyle/>
+                    <a:p>
+                      <a:r>
+                        <a:rPr sz="1000" b="1">
+                          <a:solidFill>
+                            <a:srgbClr val="2B2F36"/>
+                          </a:solidFill>
+                          <a:latin typeface="微软雅黑"/>
+                        </a:rPr>
+                        <a:t>及格(D)</a:t>
+                      </a:r>
+                    </a:p>
+                  </a:txBody>
+                  <a:tcPr>
+                    <a:solidFill>
+                      <a:srgbClr val="FFFFFF"/>
+                    </a:solidFill>
+                  </a:tcPr>
+                </a:tc>
+                <a:tc>
+                  <a:txBody>
+                    <a:bodyPr/>
+                    <a:lstStyle/>
+                    <a:p>
+                      <a:r>
+                        <a:rPr sz="950" b="0">
+                          <a:solidFill>
+                            <a:srgbClr val="2B2F36"/>
+                          </a:solidFill>
+                          <a:latin typeface="微软雅黑"/>
+                        </a:rPr>
+                        <a:t>实测 最小集 5 特征跑通：4 折×3 种子 CV acc 0.4778；规范率 93.53%</a:t>
+                      </a:r>
+                    </a:p>
+                  </a:txBody>
+                  <a:tcPr>
+                    <a:solidFill>
+                      <a:srgbClr val="FFFFFF"/>
+                    </a:solidFill>
+                  </a:tcPr>
+                </a:tc>
+                <a:tc>
+                  <a:txBody>
+                    <a:bodyPr/>
+                    <a:lstStyle/>
+                    <a:p>
+                      <a:r>
+                        <a:rPr sz="950" b="0">
+                          <a:solidFill>
+                            <a:srgbClr val="2B2F36"/>
+                          </a:solidFill>
+                          <a:latin typeface="微软雅黑"/>
+                        </a:rPr>
+                        <a:t>规范率门槛≥70% [达标] ｜ 功能OK ｜ 5 特征表能跑通；代码规范率≥70%</a:t>
+                      </a:r>
+                    </a:p>
+                  </a:txBody>
+                  <a:tcPr>
+                    <a:solidFill>
+                      <a:srgbClr val="FFFFFF"/>
+                    </a:solidFill>
+                  </a:tcPr>
+                </a:tc>
+                <a:tc>
+                  <a:txBody>
+                    <a:bodyPr/>
+                    <a:lstStyle/>
+                    <a:p>
+                      <a:r>
+                        <a:rPr sz="1000" b="1">
+                          <a:solidFill>
+                            <a:srgbClr val="2E7D46"/>
+                          </a:solidFill>
+                          <a:latin typeface="微软雅黑"/>
+                        </a:rPr>
+                        <a:t>✓ 达标</a:t>
+                      </a:r>
+                    </a:p>
+                  </a:txBody>
+                  <a:tcPr>
+                    <a:solidFill>
+                      <a:srgbClr val="FFFFFF"/>
+                    </a:solidFill>
+                  </a:tcPr>
+                </a:tc>
+              </a:tr>
+              <a:tr h="566928">
+                <a:tc>
+                  <a:txBody>
+                    <a:bodyPr/>
+                    <a:lstStyle/>
+                    <a:p>
+                      <a:r>
+                        <a:rPr sz="1000" b="1">
+                          <a:solidFill>
+                            <a:srgbClr val="2B2F36"/>
+                          </a:solidFill>
+                          <a:latin typeface="微软雅黑"/>
+                        </a:rPr>
+                        <a:t>良好(C)</a:t>
+                      </a:r>
+                    </a:p>
+                  </a:txBody>
+                  <a:tcPr>
+                    <a:solidFill>
+                      <a:srgbClr val="F7F9FB"/>
+                    </a:solidFill>
+                  </a:tcPr>
+                </a:tc>
+                <a:tc>
+                  <a:txBody>
+                    <a:bodyPr/>
+                    <a:lstStyle/>
+                    <a:p>
+                      <a:r>
+                        <a:rPr sz="950" b="0">
+                          <a:solidFill>
+                            <a:srgbClr val="2B2F36"/>
+                          </a:solidFill>
+                          <a:latin typeface="微软雅黑"/>
+                        </a:rPr>
+                        <a:t>实测 特征 18 个（线 10）；字典五栏成文 5/5，缺空 0 处</a:t>
+                      </a:r>
+                    </a:p>
+                  </a:txBody>
+                  <a:tcPr>
+                    <a:solidFill>
+                      <a:srgbClr val="F7F9FB"/>
+                    </a:solidFill>
+                  </a:tcPr>
+                </a:tc>
+                <a:tc>
+                  <a:txBody>
+                    <a:bodyPr/>
+                    <a:lstStyle/>
+                    <a:p>
+                      <a:r>
+                        <a:rPr sz="950" b="0">
+                          <a:solidFill>
+                            <a:srgbClr val="2B2F36"/>
+                          </a:solidFill>
+                          <a:latin typeface="微软雅黑"/>
+                        </a:rPr>
+                        <a:t>规范率不另设线（工单仅 D 档设线，实测 93.53%） [达标] ｜ 功能OK ｜ ≥10 特征且字典完整（名称/公式/含义/单位/范围五栏成文）</a:t>
+                      </a:r>
+                    </a:p>
+                  </a:txBody>
+                  <a:tcPr>
+                    <a:solidFill>
+                      <a:srgbClr val="F7F9FB"/>
+                    </a:solidFill>
+                  </a:tcPr>
+                </a:tc>
+                <a:tc>
+                  <a:txBody>
+                    <a:bodyPr/>
+                    <a:lstStyle/>
+                    <a:p>
+                      <a:r>
+                        <a:rPr sz="1000" b="1">
+                          <a:solidFill>
+                            <a:srgbClr val="2E7D46"/>
+                          </a:solidFill>
+                          <a:latin typeface="微软雅黑"/>
+                        </a:rPr>
+                        <a:t>✓ 达标</a:t>
+                      </a:r>
+                    </a:p>
+                  </a:txBody>
+                  <a:tcPr>
+                    <a:solidFill>
+                      <a:srgbClr val="F7F9FB"/>
+                    </a:solidFill>
+                  </a:tcPr>
+                </a:tc>
+              </a:tr>
+              <a:tr h="566928">
+                <a:tc>
+                  <a:txBody>
+                    <a:bodyPr/>
+                    <a:lstStyle/>
+                    <a:p>
+                      <a:r>
+                        <a:rPr sz="1000" b="1">
+                          <a:solidFill>
+                            <a:srgbClr val="2B2F36"/>
+                          </a:solidFill>
+                          <a:latin typeface="微软雅黑"/>
+                        </a:rPr>
+                        <a:t>优秀(B)</a:t>
+                      </a:r>
+                    </a:p>
+                  </a:txBody>
+                  <a:tcPr>
+                    <a:solidFill>
+                      <a:srgbClr val="FFFFFF"/>
+                    </a:solidFill>
+                  </a:tcPr>
+                </a:tc>
+                <a:tc>
+                  <a:txBody>
+                    <a:bodyPr/>
+                    <a:lstStyle/>
+                    <a:p>
+                      <a:r>
+                        <a:rPr sz="950" b="0">
+                          <a:solidFill>
+                            <a:srgbClr val="2B2F36"/>
+                          </a:solidFill>
+                          <a:latin typeface="微软雅黑"/>
+                        </a:rPr>
+                        <a:t>实测 尾部砍 33.3%（6 个）后 acc -0.0028（红线 ±0.030）；决策记录 295 字</a:t>
+                      </a:r>
+                    </a:p>
+                  </a:txBody>
+                  <a:tcPr>
+                    <a:solidFill>
+                      <a:srgbClr val="FFFFFF"/>
+                    </a:solidFill>
+                  </a:tcPr>
+                </a:tc>
+                <a:tc>
+                  <a:txBody>
+                    <a:bodyPr/>
+                    <a:lstStyle/>
+                    <a:p>
+                      <a:r>
+                        <a:rPr sz="950" b="0">
+                          <a:solidFill>
+                            <a:srgbClr val="2B2F36"/>
+                          </a:solidFill>
+                          <a:latin typeface="微软雅黑"/>
+                        </a:rPr>
+                        <a:t>规范率不另设线（工单仅 D 档设线，实测 93.53%） [达标] ｜ 功能OK ｜ 特征砍 30% 性能不降（消融验证）；决策记录完整</a:t>
+                      </a:r>
+                    </a:p>
+                  </a:txBody>
+                  <a:tcPr>
+                    <a:solidFill>
+                      <a:srgbClr val="FFFFFF"/>
+                    </a:solidFill>
+                  </a:tcPr>
+                </a:tc>
+                <a:tc>
+                  <a:txBody>
+                    <a:bodyPr/>
+                    <a:lstStyle/>
+                    <a:p>
+                      <a:r>
+                        <a:rPr sz="1000" b="1">
+                          <a:solidFill>
+                            <a:srgbClr val="2E7D46"/>
+                          </a:solidFill>
+                          <a:latin typeface="微软雅黑"/>
+                        </a:rPr>
+                        <a:t>✓ 达标</a:t>
+                      </a:r>
+                    </a:p>
+                  </a:txBody>
+                  <a:tcPr>
+                    <a:solidFill>
+                      <a:srgbClr val="FFFFFF"/>
+                    </a:solidFill>
+                  </a:tcPr>
+                </a:tc>
+              </a:tr>
+              <a:tr h="566928">
+                <a:tc>
+                  <a:txBody>
+                    <a:bodyPr/>
+                    <a:lstStyle/>
+                    <a:p>
+                      <a:r>
+                        <a:rPr sz="1000" b="1">
+                          <a:solidFill>
+                            <a:srgbClr val="2B2F36"/>
+                          </a:solidFill>
+                          <a:latin typeface="微软雅黑"/>
+                        </a:rPr>
+                        <a:t>优(A)</a:t>
+                      </a:r>
+                    </a:p>
+                  </a:txBody>
+                  <a:tcPr>
+                    <a:solidFill>
+                      <a:srgbClr val="F7F9FB"/>
+                    </a:solidFill>
+                  </a:tcPr>
+                </a:tc>
+                <a:tc>
+                  <a:txBody>
+                    <a:bodyPr/>
+                    <a:lstStyle/>
+                    <a:p>
+                      <a:r>
+                        <a:rPr sz="950" b="0">
+                          <a:solidFill>
+                            <a:srgbClr val="2B2F36"/>
+                          </a:solidFill>
+                          <a:latin typeface="微软雅黑"/>
+                        </a:rPr>
+                        <a:t>实测 Top3 内 v1.1 新特征 2 个：f_ratio2x、f_hf_ratio；物理解释成文 46 字</a:t>
+                      </a:r>
+                    </a:p>
+                  </a:txBody>
+                  <a:tcPr>
+                    <a:solidFill>
+                      <a:srgbClr val="F7F9FB"/>
+                    </a:solidFill>
+                  </a:tcPr>
+                </a:tc>
+                <a:tc>
+                  <a:txBody>
+                    <a:bodyPr/>
+                    <a:lstStyle/>
+                    <a:p>
+                      <a:r>
+                        <a:rPr sz="950" b="0">
+                          <a:solidFill>
+                            <a:srgbClr val="2B2F36"/>
+                          </a:solidFill>
+                          <a:latin typeface="微软雅黑"/>
+                        </a:rPr>
+                        <a:t>规范率不另设线（工单仅 D 档设线，实测 93.53%） [达标] ｜ 功能OK ｜ 新特征进 Top3 且有物理解释</a:t>
+                      </a:r>
+                    </a:p>
+                  </a:txBody>
+                  <a:tcPr>
+                    <a:solidFill>
+                      <a:srgbClr val="F7F9FB"/>
+                    </a:solidFill>
+                  </a:tcPr>
+                </a:tc>
+                <a:tc>
+                  <a:txBody>
+                    <a:bodyPr/>
+                    <a:lstStyle/>
+                    <a:p>
+                      <a:r>
+                        <a:rPr sz="1000" b="1">
+                          <a:solidFill>
+                            <a:srgbClr val="2E7D46"/>
+                          </a:solidFill>
+                          <a:latin typeface="微软雅黑"/>
+                        </a:rPr>
+                        <a:t>✓ 达标</a:t>
+                      </a:r>
+                    </a:p>
+                  </a:txBody>
+                  <a:tcPr>
+                    <a:solidFill>
+                      <a:srgbClr val="F7F9FB"/>
+                    </a:solidFill>
+                  </a:tcPr>
+                </a:tc>
+              </a:tr>
+            </a:tbl>
+          </a:graphicData>
+        </a:graphic>
+      </p:graphicFrame>
+      <p:sp>
+        <p:nvSpPr>
+          <p:cNvPr id="25" name="Rectangle 24"/>
+          <p:cNvSpPr/>
+          <p:nvPr/>
+        </p:nvSpPr>
+        <p:spPr>
+          <a:xfrm>
+            <a:off x="457200" y="5138928"/>
+            <a:ext cx="11274552" cy="1261872"/>
+          </a:xfrm>
+          <a:prstGeom prst="rect">
+            <a:avLst/>
+          </a:prstGeom>
+          <a:solidFill>
+            <a:srgbClr val="FFF7E8"/>
+          </a:solidFill>
+          <a:ln>
+            <a:solidFill>
+              <a:srgbClr val="E8C88A"/>
+            </a:solidFill>
+          </a:ln>
+          <a:effectLst/>
+        </p:spPr>
+        <p:style>
+          <a:lnRef idx="1">
+            <a:schemeClr val="accent1"/>
+          </a:lnRef>
+          <a:fillRef idx="3">
+            <a:schemeClr val="accent1"/>
+          </a:fillRef>
+          <a:effectRef idx="2">
+            <a:schemeClr val="accent1"/>
+          </a:effectRef>
+          <a:fontRef idx="minor">
+            <a:schemeClr val="lt1"/>
+          </a:fontRef>
+        </p:style>
+        <p:txBody>
+          <a:bodyPr rtlCol="0" anchor="ctr" wrap="square"/>
+          <a:lstStyle/>
+          <a:p>
+            <a:pPr algn="ctr"/>
+          </a:p>
+        </p:txBody>
+      </p:sp>
+      <p:sp>
+        <p:nvSpPr>
+          <p:cNvPr id="26" name="TextBox 25"/>
+          <p:cNvSpPr txBox="1"/>
+          <p:nvPr/>
+        </p:nvSpPr>
+        <p:spPr>
+          <a:xfrm>
+            <a:off x="621792" y="5212080"/>
+            <a:ext cx="10927080" cy="1133856"/>
+          </a:xfrm>
+          <a:prstGeom prst="rect">
+            <a:avLst/>
+          </a:prstGeom>
+          <a:noFill/>
+        </p:spPr>
+        <p:txBody>
+          <a:bodyPr wrap="square">
+            <a:spAutoFit/>
+          </a:bodyPr>
+          <a:lstStyle/>
+          <a:p>
+            <a:r>
+              <a:rPr sz="1050" b="0">
+                <a:solidFill>
+                  <a:srgbClr val="6B4E16"/>
+                </a:solidFill>
+                <a:latin typeface="微软雅黑"/>
+              </a:rPr>
+              <a:t>人工答辩项 0 条：四档门槛均由代码实测判定</a:t>
+            </a:r>
+          </a:p>
+          <a:p>
+            <a:r>
+              <a:rPr sz="1050" b="0">
+                <a:solidFill>
+                  <a:srgbClr val="6B4E16"/>
+                </a:solidFill>
+                <a:latin typeface="微软雅黑"/>
+              </a:rPr>
+              <a:t>档位是算出来的：判定值由 run.py 本次真跑产生；工单未给数字的门槛在报告里标注为「兜底口径·非工单数字」。</a:t>
+            </a:r>
+          </a:p>
+        </p:txBody>
+      </p:sp>
+    </p:spTree>
+  </p:cSld>
+  <p:clrMapOvr>
+    <a:masterClrMapping/>
+  </p:clrMapOvr>
+</p:sld>
+</file>
+
+<file path=ppt/slides/slide65.xml><?xml version="1.0" encoding="utf-8"?>
+<p:sld xmlns:a="http://schemas.openxmlformats.org/drawingml/2006/main" xmlns:p="http://schemas.openxmlformats.org/presentationml/2006/main" xmlns:r="http://schemas.openxmlformats.org/officeDocument/2006/relationships">
+  <p:cSld>
+    <p:spTree>
+      <p:nvGrpSpPr>
+        <p:cNvPr id="1" name=""/>
+        <p:cNvGrpSpPr/>
+        <p:nvPr/>
+      </p:nvGrpSpPr>
+      <p:grpSpPr/>
+      <p:sp>
+        <p:nvSpPr>
+          <p:cNvPr id="2" name="Rectangle 1"/>
+          <p:cNvSpPr/>
+          <p:nvPr/>
+        </p:nvSpPr>
+        <p:spPr>
+          <a:xfrm>
+            <a:off x="0" y="0"/>
+            <a:ext cx="12192000" cy="1150000"/>
+          </a:xfrm>
+          <a:prstGeom prst="rect">
+            <a:avLst/>
+          </a:prstGeom>
+          <a:solidFill>
+            <a:srgbClr val="010328"/>
+          </a:solidFill>
+          <a:ln>
+            <a:noFill/>
+          </a:ln>
+          <a:effectLst/>
+        </p:spPr>
+        <p:style>
+          <a:lnRef idx="1">
+            <a:schemeClr val="accent1"/>
+          </a:lnRef>
+          <a:fillRef idx="3">
+            <a:schemeClr val="accent1"/>
+          </a:fillRef>
+          <a:effectRef idx="2">
+            <a:schemeClr val="accent1"/>
+          </a:effectRef>
+          <a:fontRef idx="minor">
+            <a:schemeClr val="lt1"/>
+          </a:fontRef>
+        </p:style>
+        <p:txBody>
+          <a:bodyPr rtlCol="0" anchor="ctr"/>
+          <a:lstStyle/>
+          <a:p>
+            <a:pPr algn="ctr"/>
+          </a:p>
+        </p:txBody>
+      </p:sp>
+      <p:sp>
+        <p:nvSpPr>
+          <p:cNvPr id="3" name="Rectangle 2"/>
+          <p:cNvSpPr/>
+          <p:nvPr/>
+        </p:nvSpPr>
+        <p:spPr>
+          <a:xfrm>
+            <a:off x="0" y="1150000"/>
+            <a:ext cx="2600000" cy="70000"/>
+          </a:xfrm>
+          <a:prstGeom prst="rect">
+            <a:avLst/>
+          </a:prstGeom>
+          <a:solidFill>
+            <a:srgbClr val="F5670F"/>
+          </a:solidFill>
+          <a:ln>
+            <a:noFill/>
+          </a:ln>
+          <a:effectLst/>
+        </p:spPr>
+        <p:style>
+          <a:lnRef idx="1">
+            <a:schemeClr val="accent1"/>
+          </a:lnRef>
+          <a:fillRef idx="3">
+            <a:schemeClr val="accent1"/>
+          </a:fillRef>
+          <a:effectRef idx="2">
+            <a:schemeClr val="accent1"/>
+          </a:effectRef>
+          <a:fontRef idx="minor">
+            <a:schemeClr val="lt1"/>
+          </a:fontRef>
+        </p:style>
+        <p:txBody>
+          <a:bodyPr rtlCol="0" anchor="ctr"/>
+          <a:lstStyle/>
+          <a:p>
+            <a:pPr algn="ctr"/>
+          </a:p>
+        </p:txBody>
+      </p:sp>
+      <p:sp>
+        <p:nvSpPr>
+          <p:cNvPr id="4" name="TextBox 3"/>
+          <p:cNvSpPr txBox="1"/>
+          <p:nvPr/>
+        </p:nvSpPr>
+        <p:spPr>
+          <a:xfrm>
+            <a:off x="700000" y="300000"/>
+            <a:ext cx="10792000" cy="700000"/>
+          </a:xfrm>
+          <a:prstGeom prst="rect">
+            <a:avLst/>
+          </a:prstGeom>
+          <a:noFill/>
+        </p:spPr>
+        <p:txBody>
+          <a:bodyPr wrap="square" anchor="t">
+            <a:spAutoFit/>
+          </a:bodyPr>
+          <a:lstStyle/>
+          <a:p>
+            <a:pPr algn="l">
+              <a:lnSpc>
+                <a:spcPct val="110000"/>
+              </a:lnSpc>
+              <a:spcAft>
+                <a:spcPts val="600"/>
+              </a:spcAft>
+            </a:pPr>
+            <a:r>
+              <a:rPr sz="2400" b="1">
+                <a:solidFill>
+                  <a:srgbClr val="FFFFFF"/>
+                </a:solidFill>
+                <a:latin typeface="微软雅黑"/>
+              </a:rPr>
+              <a:t>实跑截图证据 · m11b_feature_design</a:t>
+            </a:r>
+          </a:p>
+        </p:txBody>
+      </p:sp>
+      <p:sp>
+        <p:nvSpPr>
+          <p:cNvPr id="11" name="Rectangle 10"/>
+          <p:cNvSpPr/>
+          <p:nvPr/>
+        </p:nvSpPr>
+        <p:spPr>
+          <a:xfrm>
+            <a:off x="500000" y="6500000"/>
+            <a:ext cx="11100000" cy="20000"/>
+          </a:xfrm>
+          <a:prstGeom prst="rect">
+            <a:avLst/>
+          </a:prstGeom>
+          <a:solidFill>
+            <a:srgbClr val="C9D4EE"/>
+          </a:solidFill>
+          <a:ln>
+            <a:noFill/>
+          </a:ln>
+          <a:effectLst/>
+        </p:spPr>
+        <p:style>
+          <a:lnRef idx="1">
+            <a:schemeClr val="accent1"/>
+          </a:lnRef>
+          <a:fillRef idx="3">
+            <a:schemeClr val="accent1"/>
+          </a:fillRef>
+          <a:effectRef idx="2">
+            <a:schemeClr val="accent1"/>
+          </a:effectRef>
+          <a:fontRef idx="minor">
+            <a:schemeClr val="lt1"/>
+          </a:fontRef>
+        </p:style>
+        <p:txBody>
+          <a:bodyPr rtlCol="0" anchor="ctr"/>
+          <a:lstStyle/>
+          <a:p>
+            <a:pPr algn="ctr"/>
+          </a:p>
+        </p:txBody>
+      </p:sp>
+      <p:sp>
+        <p:nvSpPr>
+          <p:cNvPr id="12" name="TextBox 11"/>
+          <p:cNvSpPr txBox="1"/>
+          <p:nvPr/>
+        </p:nvSpPr>
+        <p:spPr>
+          <a:xfrm>
+            <a:off x="500000" y="6540000"/>
+            <a:ext cx="7000000" cy="300000"/>
+          </a:xfrm>
+          <a:prstGeom prst="rect">
+            <a:avLst/>
+          </a:prstGeom>
+          <a:noFill/>
+        </p:spPr>
+        <p:txBody>
+          <a:bodyPr wrap="square" anchor="t">
+            <a:spAutoFit/>
+          </a:bodyPr>
+          <a:lstStyle/>
+          <a:p>
+            <a:pPr algn="l">
+              <a:lnSpc>
+                <a:spcPct val="110000"/>
+              </a:lnSpc>
+              <a:spcAft>
+                <a:spcPts val="600"/>
+              </a:spcAft>
+            </a:pPr>
+            <a:r>
+              <a:rPr sz="1000" b="0">
+                <a:solidFill>
+                  <a:srgbClr val="8A97B5"/>
+                </a:solidFill>
+                <a:latin typeface="微软雅黑"/>
+              </a:rPr>
+              <a:t>两江智造集团 · AI应用基础48课时版</a:t>
+            </a:r>
+          </a:p>
+        </p:txBody>
+      </p:sp>
+      <p:sp>
+        <p:nvSpPr>
+          <p:cNvPr id="13" name="TextBox 12"/>
+          <p:cNvSpPr txBox="1"/>
+          <p:nvPr/>
+        </p:nvSpPr>
+        <p:spPr>
+          <a:xfrm>
+            <a:off x="10600000" y="6540000"/>
+            <a:ext cx="1000000" cy="300000"/>
+          </a:xfrm>
+          <a:prstGeom prst="rect">
+            <a:avLst/>
+          </a:prstGeom>
+          <a:noFill/>
+        </p:spPr>
+        <p:txBody>
+          <a:bodyPr wrap="square" anchor="t">
+            <a:spAutoFit/>
+          </a:bodyPr>
+          <a:lstStyle/>
+          <a:p>
+            <a:pPr algn="r">
+              <a:lnSpc>
+                <a:spcPct val="110000"/>
+              </a:lnSpc>
+              <a:spcAft>
+                <a:spcPts val="600"/>
+              </a:spcAft>
+            </a:pPr>
+            <a:r>
+              <a:rPr sz="1000" b="0">
+                <a:solidFill>
+                  <a:srgbClr val="8A97B5"/>
+                </a:solidFill>
+                <a:latin typeface="微软雅黑"/>
+              </a:rPr>
+              <a:t>39 / 65</a:t>
+            </a:r>
+          </a:p>
+        </p:txBody>
+      </p:sp>
+      <p:sp>
+        <p:nvSpPr>
+          <p:cNvPr id="14" name="Rectangle 13"/>
+          <p:cNvSpPr/>
+          <p:nvPr/>
+        </p:nvSpPr>
+        <p:spPr>
+          <a:xfrm>
+            <a:off x="457200" y="1481328"/>
+            <a:ext cx="5486400" cy="2304288"/>
+          </a:xfrm>
+          <a:prstGeom prst="rect">
+            <a:avLst/>
+          </a:prstGeom>
+          <a:solidFill>
+            <a:srgbClr val="FFFFFF"/>
+          </a:solidFill>
+          <a:ln>
+            <a:solidFill>
+              <a:srgbClr val="D6DCE4"/>
+            </a:solidFill>
+          </a:ln>
+          <a:effectLst/>
+        </p:spPr>
+        <p:style>
+          <a:lnRef idx="1">
+            <a:schemeClr val="accent1"/>
+          </a:lnRef>
+          <a:fillRef idx="3">
+            <a:schemeClr val="accent1"/>
+          </a:fillRef>
+          <a:effectRef idx="2">
+            <a:schemeClr val="accent1"/>
+          </a:effectRef>
+          <a:fontRef idx="minor">
+            <a:schemeClr val="lt1"/>
+          </a:fontRef>
+        </p:style>
+        <p:txBody>
+          <a:bodyPr rtlCol="0" anchor="ctr" wrap="square"/>
+          <a:lstStyle/>
+          <a:p>
+            <a:pPr algn="ctr"/>
+          </a:p>
+        </p:txBody>
+      </p:sp>
+      <p:sp>
+        <p:nvSpPr>
+          <p:cNvPr id="15" name="TextBox 14"/>
+          <p:cNvSpPr txBox="1"/>
+          <p:nvPr/>
+        </p:nvSpPr>
+        <p:spPr>
+          <a:xfrm>
+            <a:off x="530352" y="1517904"/>
+            <a:ext cx="5340096" cy="237744"/>
+          </a:xfrm>
+          <a:prstGeom prst="rect">
+            <a:avLst/>
+          </a:prstGeom>
+          <a:noFill/>
+        </p:spPr>
+        <p:txBody>
+          <a:bodyPr wrap="square">
+            <a:spAutoFit/>
+          </a:bodyPr>
+          <a:lstStyle/>
+          <a:p>
+            <a:r>
+              <a:rPr sz="950" b="1">
+                <a:solidFill>
+                  <a:srgbClr val="010328"/>
+                </a:solidFill>
+                <a:latin typeface="微软雅黑"/>
+              </a:rPr>
+              <a:t>① run.py 实跑终端输出（逐字捕获）</a:t>
+            </a:r>
+          </a:p>
+        </p:txBody>
+      </p:sp>
+      <p:pic>
+        <p:nvPicPr>
+          <p:cNvPr id="16" name="Picture 15" descr="shot_run.png"/>
+          <p:cNvPicPr>
+            <a:picLocks noChangeAspect="1"/>
+          </p:cNvPicPr>
+          <p:nvPr/>
+        </p:nvPicPr>
+        <p:blipFill>
+          <a:blip r:embed="rId2"/>
+          <a:stretch>
+            <a:fillRect/>
+          </a:stretch>
+        </p:blipFill>
+        <p:spPr>
+          <a:xfrm>
+            <a:off x="964038" y="1773936"/>
+            <a:ext cx="4472722" cy="1956816"/>
+          </a:xfrm>
+          <a:prstGeom prst="rect">
+            <a:avLst/>
+          </a:prstGeom>
+        </p:spPr>
+      </p:pic>
+      <p:sp>
+        <p:nvSpPr>
+          <p:cNvPr id="17" name="Rectangle 16"/>
+          <p:cNvSpPr/>
+          <p:nvPr/>
+        </p:nvSpPr>
+        <p:spPr>
+          <a:xfrm>
+            <a:off x="6327648" y="1481328"/>
+            <a:ext cx="5486400" cy="2304288"/>
+          </a:xfrm>
+          <a:prstGeom prst="rect">
+            <a:avLst/>
+          </a:prstGeom>
+          <a:solidFill>
+            <a:srgbClr val="FFFFFF"/>
+          </a:solidFill>
+          <a:ln>
+            <a:solidFill>
+              <a:srgbClr val="D6DCE4"/>
+            </a:solidFill>
+          </a:ln>
+          <a:effectLst/>
+        </p:spPr>
+        <p:style>
+          <a:lnRef idx="1">
+            <a:schemeClr val="accent1"/>
+          </a:lnRef>
+          <a:fillRef idx="3">
+            <a:schemeClr val="accent1"/>
+          </a:fillRef>
+          <a:effectRef idx="2">
+            <a:schemeClr val="accent1"/>
+          </a:effectRef>
+          <a:fontRef idx="minor">
+            <a:schemeClr val="lt1"/>
+          </a:fontRef>
+        </p:style>
+        <p:txBody>
+          <a:bodyPr rtlCol="0" anchor="ctr" wrap="square"/>
+          <a:lstStyle/>
+          <a:p>
+            <a:pPr algn="ctr"/>
+          </a:p>
+        </p:txBody>
+      </p:sp>
+      <p:sp>
+        <p:nvSpPr>
+          <p:cNvPr id="18" name="TextBox 17"/>
+          <p:cNvSpPr txBox="1"/>
+          <p:nvPr/>
+        </p:nvSpPr>
+        <p:spPr>
+          <a:xfrm>
+            <a:off x="6400800" y="1517904"/>
+            <a:ext cx="5340096" cy="237744"/>
+          </a:xfrm>
+          <a:prstGeom prst="rect">
+            <a:avLst/>
+          </a:prstGeom>
+          <a:noFill/>
+        </p:spPr>
+        <p:txBody>
+          <a:bodyPr wrap="square">
+            <a:spAutoFit/>
+          </a:bodyPr>
+          <a:lstStyle/>
+          <a:p>
+            <a:r>
+              <a:rPr sz="950" b="1">
+                <a:solidFill>
+                  <a:srgbClr val="010328"/>
+                </a:solidFill>
+                <a:latin typeface="微软雅黑"/>
+              </a:rPr>
+              <a:t>② pytest 全绿终端输出（逐字捕获）</a:t>
+            </a:r>
+          </a:p>
+        </p:txBody>
+      </p:sp>
+      <p:pic>
+        <p:nvPicPr>
+          <p:cNvPr id="19" name="Picture 18" descr="shot_test.png"/>
+          <p:cNvPicPr>
+            <a:picLocks noChangeAspect="1"/>
+          </p:cNvPicPr>
+          <p:nvPr/>
+        </p:nvPicPr>
+        <p:blipFill>
+          <a:blip r:embed="rId3"/>
+          <a:stretch>
+            <a:fillRect/>
+          </a:stretch>
+        </p:blipFill>
+        <p:spPr>
+          <a:xfrm>
+            <a:off x="6834486" y="1773936"/>
+            <a:ext cx="4472722" cy="1956816"/>
+          </a:xfrm>
+          <a:prstGeom prst="rect">
+            <a:avLst/>
+          </a:prstGeom>
+        </p:spPr>
+      </p:pic>
+      <p:sp>
+        <p:nvSpPr>
+          <p:cNvPr id="20" name="Rectangle 19"/>
+          <p:cNvSpPr/>
+          <p:nvPr/>
+        </p:nvSpPr>
+        <p:spPr>
+          <a:xfrm>
+            <a:off x="457200" y="3877056"/>
+            <a:ext cx="5486400" cy="2304288"/>
+          </a:xfrm>
+          <a:prstGeom prst="rect">
+            <a:avLst/>
+          </a:prstGeom>
+          <a:solidFill>
+            <a:srgbClr val="FFFFFF"/>
+          </a:solidFill>
+          <a:ln>
+            <a:solidFill>
+              <a:srgbClr val="D6DCE4"/>
+            </a:solidFill>
+          </a:ln>
+          <a:effectLst/>
+        </p:spPr>
+        <p:style>
+          <a:lnRef idx="1">
+            <a:schemeClr val="accent1"/>
+          </a:lnRef>
+          <a:fillRef idx="3">
+            <a:schemeClr val="accent1"/>
+          </a:fillRef>
+          <a:effectRef idx="2">
+            <a:schemeClr val="accent1"/>
+          </a:effectRef>
+          <a:fontRef idx="minor">
+            <a:schemeClr val="lt1"/>
+          </a:fontRef>
+        </p:style>
+        <p:txBody>
+          <a:bodyPr rtlCol="0" anchor="ctr" wrap="square"/>
+          <a:lstStyle/>
+          <a:p>
+            <a:pPr algn="ctr"/>
+          </a:p>
+        </p:txBody>
+      </p:sp>
+      <p:sp>
+        <p:nvSpPr>
+          <p:cNvPr id="21" name="TextBox 20"/>
+          <p:cNvSpPr txBox="1"/>
+          <p:nvPr/>
+        </p:nvSpPr>
+        <p:spPr>
+          <a:xfrm>
+            <a:off x="530352" y="3913632"/>
+            <a:ext cx="5340096" cy="237744"/>
+          </a:xfrm>
+          <a:prstGeom prst="rect">
+            <a:avLst/>
+          </a:prstGeom>
+          <a:noFill/>
+        </p:spPr>
+        <p:txBody>
+          <a:bodyPr wrap="square">
+            <a:spAutoFit/>
+          </a:bodyPr>
+          <a:lstStyle/>
+          <a:p>
+            <a:r>
+              <a:rPr sz="950" b="1">
+                <a:solidFill>
+                  <a:srgbClr val="010328"/>
+                </a:solidFill>
+                <a:latin typeface="微软雅黑"/>
+              </a:rPr>
+              <a:t>③ report.txt「验收档位判定（实测）」段</a:t>
+            </a:r>
+          </a:p>
+        </p:txBody>
+      </p:sp>
+      <p:pic>
+        <p:nvPicPr>
+          <p:cNvPr id="22" name="Picture 21" descr="shot_report.png"/>
+          <p:cNvPicPr>
+            <a:picLocks noChangeAspect="1"/>
+          </p:cNvPicPr>
+          <p:nvPr/>
+        </p:nvPicPr>
+        <p:blipFill>
+          <a:blip r:embed="rId4"/>
+          <a:stretch>
+            <a:fillRect/>
+          </a:stretch>
+        </p:blipFill>
+        <p:spPr>
+          <a:xfrm>
+            <a:off x="964038" y="4169664"/>
+            <a:ext cx="4472722" cy="1956816"/>
+          </a:xfrm>
+          <a:prstGeom prst="rect">
+            <a:avLst/>
+          </a:prstGeom>
+        </p:spPr>
+      </p:pic>
+      <p:sp>
+        <p:nvSpPr>
+          <p:cNvPr id="23" name="Rectangle 22"/>
+          <p:cNvSpPr/>
+          <p:nvPr/>
+        </p:nvSpPr>
+        <p:spPr>
+          <a:xfrm>
+            <a:off x="6327648" y="3877056"/>
+            <a:ext cx="5486400" cy="2304288"/>
+          </a:xfrm>
+          <a:prstGeom prst="rect">
+            <a:avLst/>
+          </a:prstGeom>
+          <a:solidFill>
+            <a:srgbClr val="F7F9FB"/>
+          </a:solidFill>
+          <a:ln>
+            <a:solidFill>
+              <a:srgbClr val="D6DCE4"/>
+            </a:solidFill>
+          </a:ln>
+          <a:effectLst/>
+        </p:spPr>
+        <p:style>
+          <a:lnRef idx="1">
+            <a:schemeClr val="accent1"/>
+          </a:lnRef>
+          <a:fillRef idx="3">
+            <a:schemeClr val="accent1"/>
+          </a:fillRef>
+          <a:effectRef idx="2">
+            <a:schemeClr val="accent1"/>
+          </a:effectRef>
+          <a:fontRef idx="minor">
+            <a:schemeClr val="lt1"/>
+          </a:fontRef>
+        </p:style>
+        <p:txBody>
+          <a:bodyPr rtlCol="0" anchor="ctr" wrap="square"/>
+          <a:lstStyle/>
+          <a:p>
+            <a:pPr algn="ctr"/>
+          </a:p>
+        </p:txBody>
+      </p:sp>
+      <p:sp>
+        <p:nvSpPr>
+          <p:cNvPr id="24" name="TextBox 23"/>
+          <p:cNvSpPr txBox="1"/>
+          <p:nvPr/>
+        </p:nvSpPr>
+        <p:spPr>
+          <a:xfrm>
+            <a:off x="6400800" y="3913632"/>
+            <a:ext cx="5340096" cy="237744"/>
+          </a:xfrm>
+          <a:prstGeom prst="rect">
+            <a:avLst/>
+          </a:prstGeom>
+          <a:noFill/>
+        </p:spPr>
+        <p:txBody>
+          <a:bodyPr wrap="square">
+            <a:spAutoFit/>
+          </a:bodyPr>
+          <a:lstStyle/>
+          <a:p>
+            <a:r>
+              <a:rPr sz="950" b="1">
+                <a:solidFill>
+                  <a:srgbClr val="010328"/>
+                </a:solidFill>
+                <a:latin typeface="微软雅黑"/>
+              </a:rPr>
+              <a:t>④ 采集口径（可复现）</a:t>
+            </a:r>
+          </a:p>
+        </p:txBody>
+      </p:sp>
+      <p:sp>
+        <p:nvSpPr>
+          <p:cNvPr id="25" name="TextBox 24"/>
+          <p:cNvSpPr txBox="1"/>
+          <p:nvPr/>
+        </p:nvSpPr>
+        <p:spPr>
+          <a:xfrm>
+            <a:off x="6437376" y="4187952"/>
+            <a:ext cx="5266944" cy="1920240"/>
+          </a:xfrm>
+          <a:prstGeom prst="rect">
+            <a:avLst/>
+          </a:prstGeom>
+          <a:noFill/>
+        </p:spPr>
+        <p:txBody>
+          <a:bodyPr wrap="square">
+            <a:spAutoFit/>
+          </a:bodyPr>
+          <a:lstStyle/>
+          <a:p>
+            <a:r>
+              <a:rPr sz="950" b="0">
+                <a:solidFill>
+                  <a:srgbClr val="2B2F36"/>
+                </a:solidFill>
+                <a:latin typeface="微软雅黑"/>
+              </a:rPr>
+              <a:t>项目：05-AI应用基础48课时版/工程化项目/m11b_feature_design/</a:t>
+            </a:r>
+          </a:p>
+          <a:p>
+            <a:r>
+              <a:rPr sz="950" b="0">
+                <a:solidFill>
+                  <a:srgbClr val="2B2F36"/>
+                </a:solidFill>
+                <a:latin typeface="微软雅黑"/>
+              </a:rPr>
+              <a:t>命令：/opt/anaconda3/bin/python run.py ｜ /opt/anaconda3/bin/python -m pytest -q</a:t>
+            </a:r>
+          </a:p>
+          <a:p>
+            <a:r>
+              <a:rPr sz="950" b="0">
+                <a:solidFill>
+                  <a:srgbClr val="2B2F36"/>
+                </a:solidFill>
+                <a:latin typeface="微软雅黑"/>
+              </a:rPr>
+              <a:t>采集：工具/ppt97/capture97.py（2026-10-28 10:50 真跑逐字捕获输出）</a:t>
+            </a:r>
+          </a:p>
+          <a:p>
+            <a:r>
+              <a:rPr sz="950" b="0">
+                <a:solidFill>
+                  <a:srgbClr val="2B2F36"/>
+                </a:solidFill>
+                <a:latin typeface="微软雅黑"/>
+              </a:rPr>
+              <a:t>渲染：工具/ppt97/terminal_png.py（终端截图，不改写任何数字）</a:t>
+            </a:r>
+          </a:p>
+          <a:p>
+            <a:r>
+              <a:rPr sz="950" b="0">
+                <a:solidFill>
+                  <a:srgbClr val="2B2F36"/>
+                </a:solidFill>
+                <a:latin typeface="微软雅黑"/>
+              </a:rPr>
+              <a:t>退出码：run=0 ｜ pytest=0</a:t>
+            </a:r>
+          </a:p>
+          <a:p>
+            <a:r>
+              <a:rPr sz="950" b="0">
+                <a:solidFill>
+                  <a:srgbClr val="2B2F36"/>
+                </a:solidFill>
+                <a:latin typeface="微软雅黑"/>
+              </a:rPr>
+              <a:t>档位判定取自 output/report.txt「验收档位判定（实测）」段</a:t>
+            </a:r>
+          </a:p>
+        </p:txBody>
+      </p:sp>
+      <p:sp>
+        <p:nvSpPr>
+          <p:cNvPr id="26" name="TextBox 25"/>
+          <p:cNvSpPr txBox="1"/>
+          <p:nvPr/>
+        </p:nvSpPr>
+        <p:spPr>
+          <a:xfrm>
+            <a:off x="457200" y="6254496"/>
+            <a:ext cx="11247120" cy="201168"/>
+          </a:xfrm>
+          <a:prstGeom prst="rect">
+            <a:avLst/>
+          </a:prstGeom>
+          <a:noFill/>
+        </p:spPr>
+        <p:txBody>
+          <a:bodyPr wrap="square">
+            <a:spAutoFit/>
+          </a:bodyPr>
+          <a:lstStyle/>
+          <a:p>
+            <a:r>
+              <a:rPr sz="900" b="0">
+                <a:solidFill>
+                  <a:srgbClr val="7A8698"/>
+                </a:solidFill>
+                <a:latin typeface="微软雅黑"/>
+              </a:rPr>
+              <a:t>截图内容逐字取自 工具/ppt97/evidence/m11b_feature_design/（capture97.py 真跑捕获，未改写数字）</a:t>
+            </a:r>
+          </a:p>
+        </p:txBody>
+      </p:sp>
+    </p:spTree>
+  </p:cSld>
+  <p:clrMapOvr>
+    <a:masterClrMapping/>
+  </p:clrMapOvr>
+</p:sld>
+</file>
+
 <file path=ppt/slides/slide7.xml><?xml version="1.0" encoding="utf-8"?>
 <p:sld xmlns:a="http://schemas.openxmlformats.org/drawingml/2006/main" xmlns:p="http://schemas.openxmlformats.org/presentationml/2006/main" xmlns:r="http://schemas.openxmlformats.org/officeDocument/2006/relationships">
   <p:cSld>
@@ -60028,7 +62054,7 @@
                 </a:solidFill>
                 <a:latin typeface="微软雅黑"/>
               </a:rPr>
-              <a:t>7 / 63</a:t>
+              <a:t>7 / 65</a:t>
             </a:r>
           </a:p>
         </p:txBody>
@@ -61000,7 +63026,7 @@
                 </a:solidFill>
                 <a:latin typeface="微软雅黑"/>
               </a:rPr>
-              <a:t>8 / 63</a:t>
+              <a:t>8 / 65</a:t>
             </a:r>
           </a:p>
         </p:txBody>
@@ -61855,7 +63881,7 @@
                 </a:solidFill>
                 <a:latin typeface="微软雅黑"/>
               </a:rPr>
-              <a:t>9 / 63</a:t>
+              <a:t>9 / 65</a:t>
             </a:r>
           </a:p>
         </p:txBody>
